--- a/chapter_notes/pptx/Unit-04 Struct Op Overloading and More.pptx
+++ b/chapter_notes/pptx/Unit-04 Struct Op Overloading and More.pptx
@@ -5,7 +5,7 @@
     <p:sldMasterId id="2147483648" r:id="rId1"/>
   </p:sldMasterIdLst>
   <p:notesMasterIdLst>
-    <p:notesMasterId r:id="rId52"/>
+    <p:notesMasterId r:id="rId53"/>
   </p:notesMasterIdLst>
   <p:sldIdLst>
     <p:sldId id="256" r:id="rId2"/>
@@ -42,22 +42,23 @@
     <p:sldId id="295" r:id="rId33"/>
     <p:sldId id="292" r:id="rId34"/>
     <p:sldId id="296" r:id="rId35"/>
-    <p:sldId id="298" r:id="rId36"/>
-    <p:sldId id="299" r:id="rId37"/>
-    <p:sldId id="300" r:id="rId38"/>
-    <p:sldId id="301" r:id="rId39"/>
-    <p:sldId id="302" r:id="rId40"/>
-    <p:sldId id="297" r:id="rId41"/>
-    <p:sldId id="303" r:id="rId42"/>
-    <p:sldId id="304" r:id="rId43"/>
-    <p:sldId id="305" r:id="rId44"/>
-    <p:sldId id="306" r:id="rId45"/>
-    <p:sldId id="307" r:id="rId46"/>
-    <p:sldId id="308" r:id="rId47"/>
-    <p:sldId id="314" r:id="rId48"/>
-    <p:sldId id="310" r:id="rId49"/>
-    <p:sldId id="312" r:id="rId50"/>
-    <p:sldId id="313" r:id="rId51"/>
+    <p:sldId id="315" r:id="rId36"/>
+    <p:sldId id="298" r:id="rId37"/>
+    <p:sldId id="299" r:id="rId38"/>
+    <p:sldId id="300" r:id="rId39"/>
+    <p:sldId id="301" r:id="rId40"/>
+    <p:sldId id="302" r:id="rId41"/>
+    <p:sldId id="297" r:id="rId42"/>
+    <p:sldId id="303" r:id="rId43"/>
+    <p:sldId id="304" r:id="rId44"/>
+    <p:sldId id="305" r:id="rId45"/>
+    <p:sldId id="306" r:id="rId46"/>
+    <p:sldId id="307" r:id="rId47"/>
+    <p:sldId id="308" r:id="rId48"/>
+    <p:sldId id="314" r:id="rId49"/>
+    <p:sldId id="310" r:id="rId50"/>
+    <p:sldId id="312" r:id="rId51"/>
+    <p:sldId id="313" r:id="rId52"/>
   </p:sldIdLst>
   <p:sldSz cx="12192000" cy="6858000"/>
   <p:notesSz cx="6858000" cy="9144000"/>
@@ -246,7 +247,7 @@
           <a:p>
             <a:fld id="{B2735D1C-2DAE-A844-AB28-6D356E73EE8D}" type="datetimeFigureOut">
               <a:rPr lang="en-US" smtClean="0"/>
-              <a:t>6/13/24</a:t>
+              <a:t>3/19/25</a:t>
             </a:fld>
             <a:endParaRPr lang="en-US"/>
           </a:p>
@@ -605,6 +606,114 @@
         <p:cNvPr id="1" name="">
           <a:extLst>
             <a:ext uri="{FF2B5EF4-FFF2-40B4-BE49-F238E27FC236}">
+              <a16:creationId xmlns:a16="http://schemas.microsoft.com/office/drawing/2014/main" id="{96D8FADE-DB66-242F-A10B-A6DD41C29292}"/>
+            </a:ext>
+          </a:extLst>
+        </p:cNvPr>
+        <p:cNvGrpSpPr/>
+        <p:nvPr/>
+      </p:nvGrpSpPr>
+      <p:grpSpPr>
+        <a:xfrm>
+          <a:off x="0" y="0"/>
+          <a:ext cx="0" cy="0"/>
+          <a:chOff x="0" y="0"/>
+          <a:chExt cx="0" cy="0"/>
+        </a:xfrm>
+      </p:grpSpPr>
+      <p:sp>
+        <p:nvSpPr>
+          <p:cNvPr id="2" name="Slide Image Placeholder 1">
+            <a:extLst>
+              <a:ext uri="{FF2B5EF4-FFF2-40B4-BE49-F238E27FC236}">
+                <a16:creationId xmlns:a16="http://schemas.microsoft.com/office/drawing/2014/main" id="{94085144-10EC-AB57-5B05-C1CE9E422DB2}"/>
+              </a:ext>
+            </a:extLst>
+          </p:cNvPr>
+          <p:cNvSpPr>
+            <a:spLocks noGrp="1" noRot="1" noChangeAspect="1"/>
+          </p:cNvSpPr>
+          <p:nvPr>
+            <p:ph type="sldImg"/>
+          </p:nvPr>
+        </p:nvSpPr>
+        <p:spPr/>
+      </p:sp>
+      <p:sp>
+        <p:nvSpPr>
+          <p:cNvPr id="3" name="Notes Placeholder 2">
+            <a:extLst>
+              <a:ext uri="{FF2B5EF4-FFF2-40B4-BE49-F238E27FC236}">
+                <a16:creationId xmlns:a16="http://schemas.microsoft.com/office/drawing/2014/main" id="{E636E204-675F-5AB4-FAA6-62E5EDF904BF}"/>
+              </a:ext>
+            </a:extLst>
+          </p:cNvPr>
+          <p:cNvSpPr>
+            <a:spLocks noGrp="1"/>
+          </p:cNvSpPr>
+          <p:nvPr>
+            <p:ph type="body" idx="1"/>
+          </p:nvPr>
+        </p:nvSpPr>
+        <p:spPr/>
+        <p:txBody>
+          <a:bodyPr/>
+          <a:lstStyle/>
+          <a:p>
+            <a:endParaRPr lang="en-US" dirty="0"/>
+          </a:p>
+        </p:txBody>
+      </p:sp>
+      <p:sp>
+        <p:nvSpPr>
+          <p:cNvPr id="4" name="Slide Number Placeholder 3">
+            <a:extLst>
+              <a:ext uri="{FF2B5EF4-FFF2-40B4-BE49-F238E27FC236}">
+                <a16:creationId xmlns:a16="http://schemas.microsoft.com/office/drawing/2014/main" id="{1AC9727A-CB99-C404-26D7-2EBBA83B06FB}"/>
+              </a:ext>
+            </a:extLst>
+          </p:cNvPr>
+          <p:cNvSpPr>
+            <a:spLocks noGrp="1"/>
+          </p:cNvSpPr>
+          <p:nvPr>
+            <p:ph type="sldNum" sz="quarter" idx="5"/>
+          </p:nvPr>
+        </p:nvSpPr>
+        <p:spPr/>
+        <p:txBody>
+          <a:bodyPr/>
+          <a:lstStyle/>
+          <a:p>
+            <a:fld id="{7B8AF8E0-C54F-AA4C-9564-2FD33EE1C5D9}" type="slidenum">
+              <a:rPr lang="en-US" smtClean="0"/>
+              <a:t>44</a:t>
+            </a:fld>
+            <a:endParaRPr lang="en-US"/>
+          </a:p>
+        </p:txBody>
+      </p:sp>
+    </p:spTree>
+    <p:extLst>
+      <p:ext uri="{BB962C8B-B14F-4D97-AF65-F5344CB8AC3E}">
+        <p14:creationId xmlns:p14="http://schemas.microsoft.com/office/powerpoint/2010/main" val="4195447928"/>
+      </p:ext>
+    </p:extLst>
+  </p:cSld>
+  <p:clrMapOvr>
+    <a:masterClrMapping/>
+  </p:clrMapOvr>
+</p:notes>
+</file>
+
+<file path=ppt/notesSlides/notesSlide11.xml><?xml version="1.0" encoding="utf-8"?>
+<p:notes xmlns:a="http://schemas.openxmlformats.org/drawingml/2006/main" xmlns:r="http://schemas.openxmlformats.org/officeDocument/2006/relationships" xmlns:p="http://schemas.openxmlformats.org/presentationml/2006/main">
+  <p:cSld>
+    <p:spTree>
+      <p:nvGrpSpPr>
+        <p:cNvPr id="1" name="">
+          <a:extLst>
+            <a:ext uri="{FF2B5EF4-FFF2-40B4-BE49-F238E27FC236}">
               <a16:creationId xmlns:a16="http://schemas.microsoft.com/office/drawing/2014/main" id="{4BB9B141-23CA-C9B0-80B6-98EBE692BEA3}"/>
             </a:ext>
           </a:extLst>
@@ -686,7 +795,7 @@
           <a:p>
             <a:fld id="{7B8AF8E0-C54F-AA4C-9564-2FD33EE1C5D9}" type="slidenum">
               <a:rPr lang="en-US" smtClean="0"/>
-              <a:t>44</a:t>
+              <a:t>45</a:t>
             </a:fld>
             <a:endParaRPr lang="en-US"/>
           </a:p>
@@ -705,7 +814,7 @@
 </p:notes>
 </file>
 
-<file path=ppt/notesSlides/notesSlide11.xml><?xml version="1.0" encoding="utf-8"?>
+<file path=ppt/notesSlides/notesSlide12.xml><?xml version="1.0" encoding="utf-8"?>
 <p:notes xmlns:a="http://schemas.openxmlformats.org/drawingml/2006/main" xmlns:r="http://schemas.openxmlformats.org/officeDocument/2006/relationships" xmlns:p="http://schemas.openxmlformats.org/presentationml/2006/main">
   <p:cSld>
     <p:spTree>
@@ -794,7 +903,7 @@
           <a:p>
             <a:fld id="{7B8AF8E0-C54F-AA4C-9564-2FD33EE1C5D9}" type="slidenum">
               <a:rPr lang="en-US" smtClean="0"/>
-              <a:t>45</a:t>
+              <a:t>46</a:t>
             </a:fld>
             <a:endParaRPr lang="en-US"/>
           </a:p>
@@ -813,7 +922,7 @@
 </p:notes>
 </file>
 
-<file path=ppt/notesSlides/notesSlide12.xml><?xml version="1.0" encoding="utf-8"?>
+<file path=ppt/notesSlides/notesSlide13.xml><?xml version="1.0" encoding="utf-8"?>
 <p:notes xmlns:a="http://schemas.openxmlformats.org/drawingml/2006/main" xmlns:r="http://schemas.openxmlformats.org/officeDocument/2006/relationships" xmlns:p="http://schemas.openxmlformats.org/presentationml/2006/main">
   <p:cSld>
     <p:spTree>
@@ -902,7 +1011,7 @@
           <a:p>
             <a:fld id="{7B8AF8E0-C54F-AA4C-9564-2FD33EE1C5D9}" type="slidenum">
               <a:rPr lang="en-US" smtClean="0"/>
-              <a:t>46</a:t>
+              <a:t>47</a:t>
             </a:fld>
             <a:endParaRPr lang="en-US"/>
           </a:p>
@@ -921,7 +1030,7 @@
 </p:notes>
 </file>
 
-<file path=ppt/notesSlides/notesSlide13.xml><?xml version="1.0" encoding="utf-8"?>
+<file path=ppt/notesSlides/notesSlide14.xml><?xml version="1.0" encoding="utf-8"?>
 <p:notes xmlns:a="http://schemas.openxmlformats.org/drawingml/2006/main" xmlns:r="http://schemas.openxmlformats.org/officeDocument/2006/relationships" xmlns:p="http://schemas.openxmlformats.org/presentationml/2006/main">
   <p:cSld>
     <p:spTree>
@@ -1010,7 +1119,7 @@
           <a:p>
             <a:fld id="{7B8AF8E0-C54F-AA4C-9564-2FD33EE1C5D9}" type="slidenum">
               <a:rPr lang="en-US" smtClean="0"/>
-              <a:t>47</a:t>
+              <a:t>48</a:t>
             </a:fld>
             <a:endParaRPr lang="en-US"/>
           </a:p>
@@ -1029,7 +1138,7 @@
 </p:notes>
 </file>
 
-<file path=ppt/notesSlides/notesSlide14.xml><?xml version="1.0" encoding="utf-8"?>
+<file path=ppt/notesSlides/notesSlide15.xml><?xml version="1.0" encoding="utf-8"?>
 <p:notes xmlns:a="http://schemas.openxmlformats.org/drawingml/2006/main" xmlns:r="http://schemas.openxmlformats.org/officeDocument/2006/relationships" xmlns:p="http://schemas.openxmlformats.org/presentationml/2006/main">
   <p:cSld>
     <p:spTree>
@@ -1118,7 +1227,7 @@
           <a:p>
             <a:fld id="{7B8AF8E0-C54F-AA4C-9564-2FD33EE1C5D9}" type="slidenum">
               <a:rPr lang="en-US" smtClean="0"/>
-              <a:t>48</a:t>
+              <a:t>49</a:t>
             </a:fld>
             <a:endParaRPr lang="en-US"/>
           </a:p>
@@ -1137,7 +1246,7 @@
 </p:notes>
 </file>
 
-<file path=ppt/notesSlides/notesSlide15.xml><?xml version="1.0" encoding="utf-8"?>
+<file path=ppt/notesSlides/notesSlide16.xml><?xml version="1.0" encoding="utf-8"?>
 <p:notes xmlns:a="http://schemas.openxmlformats.org/drawingml/2006/main" xmlns:r="http://schemas.openxmlformats.org/officeDocument/2006/relationships" xmlns:p="http://schemas.openxmlformats.org/presentationml/2006/main">
   <p:cSld>
     <p:spTree>
@@ -1226,7 +1335,7 @@
           <a:p>
             <a:fld id="{7B8AF8E0-C54F-AA4C-9564-2FD33EE1C5D9}" type="slidenum">
               <a:rPr lang="en-US" smtClean="0"/>
-              <a:t>49</a:t>
+              <a:t>50</a:t>
             </a:fld>
             <a:endParaRPr lang="en-US"/>
           </a:p>
@@ -1245,7 +1354,7 @@
 </p:notes>
 </file>
 
-<file path=ppt/notesSlides/notesSlide16.xml><?xml version="1.0" encoding="utf-8"?>
+<file path=ppt/notesSlides/notesSlide17.xml><?xml version="1.0" encoding="utf-8"?>
 <p:notes xmlns:a="http://schemas.openxmlformats.org/drawingml/2006/main" xmlns:r="http://schemas.openxmlformats.org/officeDocument/2006/relationships" xmlns:p="http://schemas.openxmlformats.org/presentationml/2006/main">
   <p:cSld>
     <p:spTree>
@@ -1334,7 +1443,7 @@
           <a:p>
             <a:fld id="{7B8AF8E0-C54F-AA4C-9564-2FD33EE1C5D9}" type="slidenum">
               <a:rPr lang="en-US" smtClean="0"/>
-              <a:t>50</a:t>
+              <a:t>51</a:t>
             </a:fld>
             <a:endParaRPr lang="en-US"/>
           </a:p>
@@ -1354,6 +1463,114 @@
 </file>
 
 <file path=ppt/notesSlides/notesSlide2.xml><?xml version="1.0" encoding="utf-8"?>
+<p:notes xmlns:a="http://schemas.openxmlformats.org/drawingml/2006/main" xmlns:r="http://schemas.openxmlformats.org/officeDocument/2006/relationships" xmlns:p="http://schemas.openxmlformats.org/presentationml/2006/main">
+  <p:cSld>
+    <p:spTree>
+      <p:nvGrpSpPr>
+        <p:cNvPr id="1" name="">
+          <a:extLst>
+            <a:ext uri="{FF2B5EF4-FFF2-40B4-BE49-F238E27FC236}">
+              <a16:creationId xmlns:a16="http://schemas.microsoft.com/office/drawing/2014/main" id="{7486D3D1-6C9F-0D43-EA91-7AA050653AC5}"/>
+            </a:ext>
+          </a:extLst>
+        </p:cNvPr>
+        <p:cNvGrpSpPr/>
+        <p:nvPr/>
+      </p:nvGrpSpPr>
+      <p:grpSpPr>
+        <a:xfrm>
+          <a:off x="0" y="0"/>
+          <a:ext cx="0" cy="0"/>
+          <a:chOff x="0" y="0"/>
+          <a:chExt cx="0" cy="0"/>
+        </a:xfrm>
+      </p:grpSpPr>
+      <p:sp>
+        <p:nvSpPr>
+          <p:cNvPr id="2" name="Slide Image Placeholder 1">
+            <a:extLst>
+              <a:ext uri="{FF2B5EF4-FFF2-40B4-BE49-F238E27FC236}">
+                <a16:creationId xmlns:a16="http://schemas.microsoft.com/office/drawing/2014/main" id="{F8C2FAD1-3631-8C97-ABDC-64AC18D02A4D}"/>
+              </a:ext>
+            </a:extLst>
+          </p:cNvPr>
+          <p:cNvSpPr>
+            <a:spLocks noGrp="1" noRot="1" noChangeAspect="1"/>
+          </p:cNvSpPr>
+          <p:nvPr>
+            <p:ph type="sldImg"/>
+          </p:nvPr>
+        </p:nvSpPr>
+        <p:spPr/>
+      </p:sp>
+      <p:sp>
+        <p:nvSpPr>
+          <p:cNvPr id="3" name="Notes Placeholder 2">
+            <a:extLst>
+              <a:ext uri="{FF2B5EF4-FFF2-40B4-BE49-F238E27FC236}">
+                <a16:creationId xmlns:a16="http://schemas.microsoft.com/office/drawing/2014/main" id="{B54F1E52-2C29-36D5-AFFC-1AFBC0713A69}"/>
+              </a:ext>
+            </a:extLst>
+          </p:cNvPr>
+          <p:cNvSpPr>
+            <a:spLocks noGrp="1"/>
+          </p:cNvSpPr>
+          <p:nvPr>
+            <p:ph type="body" idx="1"/>
+          </p:nvPr>
+        </p:nvSpPr>
+        <p:spPr/>
+        <p:txBody>
+          <a:bodyPr/>
+          <a:lstStyle/>
+          <a:p>
+            <a:endParaRPr lang="en-US" dirty="0"/>
+          </a:p>
+        </p:txBody>
+      </p:sp>
+      <p:sp>
+        <p:nvSpPr>
+          <p:cNvPr id="4" name="Slide Number Placeholder 3">
+            <a:extLst>
+              <a:ext uri="{FF2B5EF4-FFF2-40B4-BE49-F238E27FC236}">
+                <a16:creationId xmlns:a16="http://schemas.microsoft.com/office/drawing/2014/main" id="{8BB32585-DCA9-2DFB-61C4-C945F73265A0}"/>
+              </a:ext>
+            </a:extLst>
+          </p:cNvPr>
+          <p:cNvSpPr>
+            <a:spLocks noGrp="1"/>
+          </p:cNvSpPr>
+          <p:nvPr>
+            <p:ph type="sldNum" sz="quarter" idx="5"/>
+          </p:nvPr>
+        </p:nvSpPr>
+        <p:spPr/>
+        <p:txBody>
+          <a:bodyPr/>
+          <a:lstStyle/>
+          <a:p>
+            <a:fld id="{7B8AF8E0-C54F-AA4C-9564-2FD33EE1C5D9}" type="slidenum">
+              <a:rPr lang="en-US" smtClean="0"/>
+              <a:t>35</a:t>
+            </a:fld>
+            <a:endParaRPr lang="en-US"/>
+          </a:p>
+        </p:txBody>
+      </p:sp>
+    </p:spTree>
+    <p:extLst>
+      <p:ext uri="{BB962C8B-B14F-4D97-AF65-F5344CB8AC3E}">
+        <p14:creationId xmlns:p14="http://schemas.microsoft.com/office/powerpoint/2010/main" val="3222041800"/>
+      </p:ext>
+    </p:extLst>
+  </p:cSld>
+  <p:clrMapOvr>
+    <a:masterClrMapping/>
+  </p:clrMapOvr>
+</p:notes>
+</file>
+
+<file path=ppt/notesSlides/notesSlide3.xml><?xml version="1.0" encoding="utf-8"?>
 <p:notes xmlns:a="http://schemas.openxmlformats.org/drawingml/2006/main" xmlns:r="http://schemas.openxmlformats.org/officeDocument/2006/relationships" xmlns:p="http://schemas.openxmlformats.org/presentationml/2006/main">
   <p:cSld>
     <p:spTree>
@@ -1442,7 +1659,7 @@
           <a:p>
             <a:fld id="{7B8AF8E0-C54F-AA4C-9564-2FD33EE1C5D9}" type="slidenum">
               <a:rPr lang="en-US" smtClean="0"/>
-              <a:t>35</a:t>
+              <a:t>36</a:t>
             </a:fld>
             <a:endParaRPr lang="en-US"/>
           </a:p>
@@ -1461,7 +1678,7 @@
 </p:notes>
 </file>
 
-<file path=ppt/notesSlides/notesSlide3.xml><?xml version="1.0" encoding="utf-8"?>
+<file path=ppt/notesSlides/notesSlide4.xml><?xml version="1.0" encoding="utf-8"?>
 <p:notes xmlns:a="http://schemas.openxmlformats.org/drawingml/2006/main" xmlns:r="http://schemas.openxmlformats.org/officeDocument/2006/relationships" xmlns:p="http://schemas.openxmlformats.org/presentationml/2006/main">
   <p:cSld>
     <p:spTree>
@@ -1550,7 +1767,7 @@
           <a:p>
             <a:fld id="{7B8AF8E0-C54F-AA4C-9564-2FD33EE1C5D9}" type="slidenum">
               <a:rPr lang="en-US" smtClean="0"/>
-              <a:t>36</a:t>
+              <a:t>37</a:t>
             </a:fld>
             <a:endParaRPr lang="en-US"/>
           </a:p>
@@ -1569,7 +1786,7 @@
 </p:notes>
 </file>
 
-<file path=ppt/notesSlides/notesSlide4.xml><?xml version="1.0" encoding="utf-8"?>
+<file path=ppt/notesSlides/notesSlide5.xml><?xml version="1.0" encoding="utf-8"?>
 <p:notes xmlns:a="http://schemas.openxmlformats.org/drawingml/2006/main" xmlns:r="http://schemas.openxmlformats.org/officeDocument/2006/relationships" xmlns:p="http://schemas.openxmlformats.org/presentationml/2006/main">
   <p:cSld>
     <p:spTree>
@@ -1658,7 +1875,7 @@
           <a:p>
             <a:fld id="{7B8AF8E0-C54F-AA4C-9564-2FD33EE1C5D9}" type="slidenum">
               <a:rPr lang="en-US" smtClean="0"/>
-              <a:t>37</a:t>
+              <a:t>38</a:t>
             </a:fld>
             <a:endParaRPr lang="en-US"/>
           </a:p>
@@ -1677,7 +1894,7 @@
 </p:notes>
 </file>
 
-<file path=ppt/notesSlides/notesSlide5.xml><?xml version="1.0" encoding="utf-8"?>
+<file path=ppt/notesSlides/notesSlide6.xml><?xml version="1.0" encoding="utf-8"?>
 <p:notes xmlns:a="http://schemas.openxmlformats.org/drawingml/2006/main" xmlns:r="http://schemas.openxmlformats.org/officeDocument/2006/relationships" xmlns:p="http://schemas.openxmlformats.org/presentationml/2006/main">
   <p:cSld>
     <p:spTree>
@@ -1766,7 +1983,7 @@
           <a:p>
             <a:fld id="{7B8AF8E0-C54F-AA4C-9564-2FD33EE1C5D9}" type="slidenum">
               <a:rPr lang="en-US" smtClean="0"/>
-              <a:t>38</a:t>
+              <a:t>39</a:t>
             </a:fld>
             <a:endParaRPr lang="en-US"/>
           </a:p>
@@ -1785,7 +2002,7 @@
 </p:notes>
 </file>
 
-<file path=ppt/notesSlides/notesSlide6.xml><?xml version="1.0" encoding="utf-8"?>
+<file path=ppt/notesSlides/notesSlide7.xml><?xml version="1.0" encoding="utf-8"?>
 <p:notes xmlns:a="http://schemas.openxmlformats.org/drawingml/2006/main" xmlns:r="http://schemas.openxmlformats.org/officeDocument/2006/relationships" xmlns:p="http://schemas.openxmlformats.org/presentationml/2006/main">
   <p:cSld>
     <p:spTree>
@@ -1874,7 +2091,7 @@
           <a:p>
             <a:fld id="{7B8AF8E0-C54F-AA4C-9564-2FD33EE1C5D9}" type="slidenum">
               <a:rPr lang="en-US" smtClean="0"/>
-              <a:t>39</a:t>
+              <a:t>40</a:t>
             </a:fld>
             <a:endParaRPr lang="en-US"/>
           </a:p>
@@ -1893,7 +2110,7 @@
 </p:notes>
 </file>
 
-<file path=ppt/notesSlides/notesSlide7.xml><?xml version="1.0" encoding="utf-8"?>
+<file path=ppt/notesSlides/notesSlide8.xml><?xml version="1.0" encoding="utf-8"?>
 <p:notes xmlns:a="http://schemas.openxmlformats.org/drawingml/2006/main" xmlns:r="http://schemas.openxmlformats.org/officeDocument/2006/relationships" xmlns:p="http://schemas.openxmlformats.org/presentationml/2006/main">
   <p:cSld>
     <p:spTree>
@@ -1982,7 +2199,7 @@
           <a:p>
             <a:fld id="{7B8AF8E0-C54F-AA4C-9564-2FD33EE1C5D9}" type="slidenum">
               <a:rPr lang="en-US" smtClean="0"/>
-              <a:t>41</a:t>
+              <a:t>42</a:t>
             </a:fld>
             <a:endParaRPr lang="en-US"/>
           </a:p>
@@ -2001,7 +2218,7 @@
 </p:notes>
 </file>
 
-<file path=ppt/notesSlides/notesSlide8.xml><?xml version="1.0" encoding="utf-8"?>
+<file path=ppt/notesSlides/notesSlide9.xml><?xml version="1.0" encoding="utf-8"?>
 <p:notes xmlns:a="http://schemas.openxmlformats.org/drawingml/2006/main" xmlns:r="http://schemas.openxmlformats.org/officeDocument/2006/relationships" xmlns:p="http://schemas.openxmlformats.org/presentationml/2006/main">
   <p:cSld>
     <p:spTree>
@@ -2090,7 +2307,7 @@
           <a:p>
             <a:fld id="{7B8AF8E0-C54F-AA4C-9564-2FD33EE1C5D9}" type="slidenum">
               <a:rPr lang="en-US" smtClean="0"/>
-              <a:t>42</a:t>
+              <a:t>43</a:t>
             </a:fld>
             <a:endParaRPr lang="en-US"/>
           </a:p>
@@ -2100,114 +2317,6 @@
     <p:extLst>
       <p:ext uri="{BB962C8B-B14F-4D97-AF65-F5344CB8AC3E}">
         <p14:creationId xmlns:p14="http://schemas.microsoft.com/office/powerpoint/2010/main" val="3475299972"/>
-      </p:ext>
-    </p:extLst>
-  </p:cSld>
-  <p:clrMapOvr>
-    <a:masterClrMapping/>
-  </p:clrMapOvr>
-</p:notes>
-</file>
-
-<file path=ppt/notesSlides/notesSlide9.xml><?xml version="1.0" encoding="utf-8"?>
-<p:notes xmlns:a="http://schemas.openxmlformats.org/drawingml/2006/main" xmlns:r="http://schemas.openxmlformats.org/officeDocument/2006/relationships" xmlns:p="http://schemas.openxmlformats.org/presentationml/2006/main">
-  <p:cSld>
-    <p:spTree>
-      <p:nvGrpSpPr>
-        <p:cNvPr id="1" name="">
-          <a:extLst>
-            <a:ext uri="{FF2B5EF4-FFF2-40B4-BE49-F238E27FC236}">
-              <a16:creationId xmlns:a16="http://schemas.microsoft.com/office/drawing/2014/main" id="{96D8FADE-DB66-242F-A10B-A6DD41C29292}"/>
-            </a:ext>
-          </a:extLst>
-        </p:cNvPr>
-        <p:cNvGrpSpPr/>
-        <p:nvPr/>
-      </p:nvGrpSpPr>
-      <p:grpSpPr>
-        <a:xfrm>
-          <a:off x="0" y="0"/>
-          <a:ext cx="0" cy="0"/>
-          <a:chOff x="0" y="0"/>
-          <a:chExt cx="0" cy="0"/>
-        </a:xfrm>
-      </p:grpSpPr>
-      <p:sp>
-        <p:nvSpPr>
-          <p:cNvPr id="2" name="Slide Image Placeholder 1">
-            <a:extLst>
-              <a:ext uri="{FF2B5EF4-FFF2-40B4-BE49-F238E27FC236}">
-                <a16:creationId xmlns:a16="http://schemas.microsoft.com/office/drawing/2014/main" id="{94085144-10EC-AB57-5B05-C1CE9E422DB2}"/>
-              </a:ext>
-            </a:extLst>
-          </p:cNvPr>
-          <p:cNvSpPr>
-            <a:spLocks noGrp="1" noRot="1" noChangeAspect="1"/>
-          </p:cNvSpPr>
-          <p:nvPr>
-            <p:ph type="sldImg"/>
-          </p:nvPr>
-        </p:nvSpPr>
-        <p:spPr/>
-      </p:sp>
-      <p:sp>
-        <p:nvSpPr>
-          <p:cNvPr id="3" name="Notes Placeholder 2">
-            <a:extLst>
-              <a:ext uri="{FF2B5EF4-FFF2-40B4-BE49-F238E27FC236}">
-                <a16:creationId xmlns:a16="http://schemas.microsoft.com/office/drawing/2014/main" id="{E636E204-675F-5AB4-FAA6-62E5EDF904BF}"/>
-              </a:ext>
-            </a:extLst>
-          </p:cNvPr>
-          <p:cNvSpPr>
-            <a:spLocks noGrp="1"/>
-          </p:cNvSpPr>
-          <p:nvPr>
-            <p:ph type="body" idx="1"/>
-          </p:nvPr>
-        </p:nvSpPr>
-        <p:spPr/>
-        <p:txBody>
-          <a:bodyPr/>
-          <a:lstStyle/>
-          <a:p>
-            <a:endParaRPr lang="en-US" dirty="0"/>
-          </a:p>
-        </p:txBody>
-      </p:sp>
-      <p:sp>
-        <p:nvSpPr>
-          <p:cNvPr id="4" name="Slide Number Placeholder 3">
-            <a:extLst>
-              <a:ext uri="{FF2B5EF4-FFF2-40B4-BE49-F238E27FC236}">
-                <a16:creationId xmlns:a16="http://schemas.microsoft.com/office/drawing/2014/main" id="{1AC9727A-CB99-C404-26D7-2EBBA83B06FB}"/>
-              </a:ext>
-            </a:extLst>
-          </p:cNvPr>
-          <p:cNvSpPr>
-            <a:spLocks noGrp="1"/>
-          </p:cNvSpPr>
-          <p:nvPr>
-            <p:ph type="sldNum" sz="quarter" idx="5"/>
-          </p:nvPr>
-        </p:nvSpPr>
-        <p:spPr/>
-        <p:txBody>
-          <a:bodyPr/>
-          <a:lstStyle/>
-          <a:p>
-            <a:fld id="{7B8AF8E0-C54F-AA4C-9564-2FD33EE1C5D9}" type="slidenum">
-              <a:rPr lang="en-US" smtClean="0"/>
-              <a:t>43</a:t>
-            </a:fld>
-            <a:endParaRPr lang="en-US"/>
-          </a:p>
-        </p:txBody>
-      </p:sp>
-    </p:spTree>
-    <p:extLst>
-      <p:ext uri="{BB962C8B-B14F-4D97-AF65-F5344CB8AC3E}">
-        <p14:creationId xmlns:p14="http://schemas.microsoft.com/office/powerpoint/2010/main" val="4195447928"/>
       </p:ext>
     </p:extLst>
   </p:cSld>
@@ -2364,7 +2473,7 @@
           <a:p>
             <a:fld id="{5FABD409-7894-914B-8B56-CBEFCA3FA783}" type="datetimeFigureOut">
               <a:rPr lang="en-US" smtClean="0"/>
-              <a:t>6/13/24</a:t>
+              <a:t>3/19/25</a:t>
             </a:fld>
             <a:endParaRPr lang="en-US"/>
           </a:p>
@@ -2562,7 +2671,7 @@
           <a:p>
             <a:fld id="{5FABD409-7894-914B-8B56-CBEFCA3FA783}" type="datetimeFigureOut">
               <a:rPr lang="en-US" smtClean="0"/>
-              <a:t>6/13/24</a:t>
+              <a:t>3/19/25</a:t>
             </a:fld>
             <a:endParaRPr lang="en-US"/>
           </a:p>
@@ -2770,7 +2879,7 @@
           <a:p>
             <a:fld id="{5FABD409-7894-914B-8B56-CBEFCA3FA783}" type="datetimeFigureOut">
               <a:rPr lang="en-US" smtClean="0"/>
-              <a:t>6/13/24</a:t>
+              <a:t>3/19/25</a:t>
             </a:fld>
             <a:endParaRPr lang="en-US"/>
           </a:p>
@@ -2968,7 +3077,7 @@
           <a:p>
             <a:fld id="{5FABD409-7894-914B-8B56-CBEFCA3FA783}" type="datetimeFigureOut">
               <a:rPr lang="en-US" smtClean="0"/>
-              <a:t>6/13/24</a:t>
+              <a:t>3/19/25</a:t>
             </a:fld>
             <a:endParaRPr lang="en-US"/>
           </a:p>
@@ -3243,7 +3352,7 @@
           <a:p>
             <a:fld id="{5FABD409-7894-914B-8B56-CBEFCA3FA783}" type="datetimeFigureOut">
               <a:rPr lang="en-US" smtClean="0"/>
-              <a:t>6/13/24</a:t>
+              <a:t>3/19/25</a:t>
             </a:fld>
             <a:endParaRPr lang="en-US"/>
           </a:p>
@@ -3508,7 +3617,7 @@
           <a:p>
             <a:fld id="{5FABD409-7894-914B-8B56-CBEFCA3FA783}" type="datetimeFigureOut">
               <a:rPr lang="en-US" smtClean="0"/>
-              <a:t>6/13/24</a:t>
+              <a:t>3/19/25</a:t>
             </a:fld>
             <a:endParaRPr lang="en-US"/>
           </a:p>
@@ -3920,7 +4029,7 @@
           <a:p>
             <a:fld id="{5FABD409-7894-914B-8B56-CBEFCA3FA783}" type="datetimeFigureOut">
               <a:rPr lang="en-US" smtClean="0"/>
-              <a:t>6/13/24</a:t>
+              <a:t>3/19/25</a:t>
             </a:fld>
             <a:endParaRPr lang="en-US"/>
           </a:p>
@@ -4061,7 +4170,7 @@
           <a:p>
             <a:fld id="{5FABD409-7894-914B-8B56-CBEFCA3FA783}" type="datetimeFigureOut">
               <a:rPr lang="en-US" smtClean="0"/>
-              <a:t>6/13/24</a:t>
+              <a:t>3/19/25</a:t>
             </a:fld>
             <a:endParaRPr lang="en-US"/>
           </a:p>
@@ -4174,7 +4283,7 @@
           <a:p>
             <a:fld id="{5FABD409-7894-914B-8B56-CBEFCA3FA783}" type="datetimeFigureOut">
               <a:rPr lang="en-US" smtClean="0"/>
-              <a:t>6/13/24</a:t>
+              <a:t>3/19/25</a:t>
             </a:fld>
             <a:endParaRPr lang="en-US"/>
           </a:p>
@@ -4485,7 +4594,7 @@
           <a:p>
             <a:fld id="{5FABD409-7894-914B-8B56-CBEFCA3FA783}" type="datetimeFigureOut">
               <a:rPr lang="en-US" smtClean="0"/>
-              <a:t>6/13/24</a:t>
+              <a:t>3/19/25</a:t>
             </a:fld>
             <a:endParaRPr lang="en-US"/>
           </a:p>
@@ -4773,7 +4882,7 @@
           <a:p>
             <a:fld id="{5FABD409-7894-914B-8B56-CBEFCA3FA783}" type="datetimeFigureOut">
               <a:rPr lang="en-US" smtClean="0"/>
-              <a:t>6/13/24</a:t>
+              <a:t>3/19/25</a:t>
             </a:fld>
             <a:endParaRPr lang="en-US"/>
           </a:p>
@@ -5014,7 +5123,7 @@
           <a:p>
             <a:fld id="{5FABD409-7894-914B-8B56-CBEFCA3FA783}" type="datetimeFigureOut">
               <a:rPr lang="en-US" smtClean="0"/>
-              <a:t>6/13/24</a:t>
+              <a:t>3/19/25</a:t>
             </a:fld>
             <a:endParaRPr lang="en-US"/>
           </a:p>
@@ -13386,6 +13495,227 @@
         <p:cNvPr id="1" name="">
           <a:extLst>
             <a:ext uri="{FF2B5EF4-FFF2-40B4-BE49-F238E27FC236}">
+              <a16:creationId xmlns:a16="http://schemas.microsoft.com/office/drawing/2014/main" id="{7C522F5B-8779-BC87-99D3-869E42CA36ED}"/>
+            </a:ext>
+          </a:extLst>
+        </p:cNvPr>
+        <p:cNvGrpSpPr/>
+        <p:nvPr/>
+      </p:nvGrpSpPr>
+      <p:grpSpPr>
+        <a:xfrm>
+          <a:off x="0" y="0"/>
+          <a:ext cx="0" cy="0"/>
+          <a:chOff x="0" y="0"/>
+          <a:chExt cx="0" cy="0"/>
+        </a:xfrm>
+      </p:grpSpPr>
+      <p:sp>
+        <p:nvSpPr>
+          <p:cNvPr id="18" name="Title 1">
+            <a:extLst>
+              <a:ext uri="{FF2B5EF4-FFF2-40B4-BE49-F238E27FC236}">
+                <a16:creationId xmlns:a16="http://schemas.microsoft.com/office/drawing/2014/main" id="{D5D1314C-4381-37DE-7A9C-3B582471E515}"/>
+              </a:ext>
+            </a:extLst>
+          </p:cNvPr>
+          <p:cNvSpPr>
+            <a:spLocks noGrp="1"/>
+          </p:cNvSpPr>
+          <p:nvPr>
+            <p:ph type="ctrTitle"/>
+          </p:nvPr>
+        </p:nvSpPr>
+        <p:spPr>
+          <a:xfrm>
+            <a:off x="6211957" y="126890"/>
+            <a:ext cx="6164073" cy="576982"/>
+          </a:xfrm>
+        </p:spPr>
+        <p:txBody>
+          <a:bodyPr>
+            <a:noAutofit/>
+          </a:bodyPr>
+          <a:lstStyle/>
+          <a:p>
+            <a:r>
+              <a:rPr lang="en-US" sz="3200" dirty="0">
+                <a:solidFill>
+                  <a:srgbClr val="FFC000"/>
+                </a:solidFill>
+              </a:rPr>
+              <a:t>Struct [</a:t>
+            </a:r>
+            <a:r>
+              <a:rPr lang="en-US" sz="3200" dirty="0">
+                <a:solidFill>
+                  <a:schemeClr val="accent3">
+                    <a:lumMod val="60000"/>
+                    <a:lumOff val="40000"/>
+                  </a:schemeClr>
+                </a:solidFill>
+              </a:rPr>
+              <a:t>…</a:t>
+            </a:r>
+            <a:r>
+              <a:rPr lang="en-US" sz="3200" dirty="0">
+                <a:solidFill>
+                  <a:srgbClr val="FFC000"/>
+                </a:solidFill>
+              </a:rPr>
+              <a:t>]……</a:t>
+            </a:r>
+          </a:p>
+        </p:txBody>
+      </p:sp>
+      <p:pic>
+        <p:nvPicPr>
+          <p:cNvPr id="3" name="Picture 2">
+            <a:extLst>
+              <a:ext uri="{FF2B5EF4-FFF2-40B4-BE49-F238E27FC236}">
+                <a16:creationId xmlns:a16="http://schemas.microsoft.com/office/drawing/2014/main" id="{A7AACB7B-28F1-9BB7-1B99-1CD867B5E892}"/>
+              </a:ext>
+            </a:extLst>
+          </p:cNvPr>
+          <p:cNvPicPr>
+            <a:picLocks noChangeAspect="1"/>
+          </p:cNvPicPr>
+          <p:nvPr/>
+        </p:nvPicPr>
+        <p:blipFill>
+          <a:blip r:embed="rId3"/>
+          <a:stretch>
+            <a:fillRect/>
+          </a:stretch>
+        </p:blipFill>
+        <p:spPr>
+          <a:xfrm>
+            <a:off x="0" y="1528116"/>
+            <a:ext cx="6638693" cy="3801767"/>
+          </a:xfrm>
+          <a:prstGeom prst="rect">
+            <a:avLst/>
+          </a:prstGeom>
+        </p:spPr>
+      </p:pic>
+      <p:pic>
+        <p:nvPicPr>
+          <p:cNvPr id="4" name="Picture 3">
+            <a:extLst>
+              <a:ext uri="{FF2B5EF4-FFF2-40B4-BE49-F238E27FC236}">
+                <a16:creationId xmlns:a16="http://schemas.microsoft.com/office/drawing/2014/main" id="{729C1EDE-F869-5E1C-804D-69DED7BDD864}"/>
+              </a:ext>
+            </a:extLst>
+          </p:cNvPr>
+          <p:cNvPicPr>
+            <a:picLocks noChangeAspect="1"/>
+          </p:cNvPicPr>
+          <p:nvPr/>
+        </p:nvPicPr>
+        <p:blipFill>
+          <a:blip r:embed="rId4"/>
+          <a:srcRect/>
+          <a:stretch/>
+        </p:blipFill>
+        <p:spPr>
+          <a:xfrm>
+            <a:off x="6752627" y="1729468"/>
+            <a:ext cx="5326357" cy="800815"/>
+          </a:xfrm>
+          <a:prstGeom prst="rect">
+            <a:avLst/>
+          </a:prstGeom>
+        </p:spPr>
+      </p:pic>
+      <p:pic>
+        <p:nvPicPr>
+          <p:cNvPr id="9" name="Picture 8">
+            <a:extLst>
+              <a:ext uri="{FF2B5EF4-FFF2-40B4-BE49-F238E27FC236}">
+                <a16:creationId xmlns:a16="http://schemas.microsoft.com/office/drawing/2014/main" id="{CFBF9AE6-56CF-06F3-DB53-C4297B6CDB75}"/>
+              </a:ext>
+            </a:extLst>
+          </p:cNvPr>
+          <p:cNvPicPr>
+            <a:picLocks noChangeAspect="1"/>
+          </p:cNvPicPr>
+          <p:nvPr/>
+        </p:nvPicPr>
+        <p:blipFill>
+          <a:blip r:embed="rId5"/>
+          <a:stretch>
+            <a:fillRect/>
+          </a:stretch>
+        </p:blipFill>
+        <p:spPr>
+          <a:xfrm>
+            <a:off x="6752626" y="2579239"/>
+            <a:ext cx="5326357" cy="1440226"/>
+          </a:xfrm>
+          <a:prstGeom prst="rect">
+            <a:avLst/>
+          </a:prstGeom>
+        </p:spPr>
+      </p:pic>
+      <p:pic>
+        <p:nvPicPr>
+          <p:cNvPr id="10" name="Picture 9">
+            <a:extLst>
+              <a:ext uri="{FF2B5EF4-FFF2-40B4-BE49-F238E27FC236}">
+                <a16:creationId xmlns:a16="http://schemas.microsoft.com/office/drawing/2014/main" id="{27E767AE-BA49-D65E-1C51-39A47F3B1185}"/>
+              </a:ext>
+            </a:extLst>
+          </p:cNvPr>
+          <p:cNvPicPr>
+            <a:picLocks noChangeAspect="1"/>
+          </p:cNvPicPr>
+          <p:nvPr/>
+        </p:nvPicPr>
+        <p:blipFill>
+          <a:blip r:embed="rId6"/>
+          <a:stretch>
+            <a:fillRect/>
+          </a:stretch>
+        </p:blipFill>
+        <p:spPr>
+          <a:xfrm>
+            <a:off x="6752625" y="4069780"/>
+            <a:ext cx="5326358" cy="1018091"/>
+          </a:xfrm>
+          <a:prstGeom prst="rect">
+            <a:avLst/>
+          </a:prstGeom>
+        </p:spPr>
+      </p:pic>
+    </p:spTree>
+    <p:extLst>
+      <p:ext uri="{BB962C8B-B14F-4D97-AF65-F5344CB8AC3E}">
+        <p14:creationId xmlns:p14="http://schemas.microsoft.com/office/powerpoint/2010/main" val="2828866939"/>
+      </p:ext>
+    </p:extLst>
+  </p:cSld>
+  <p:clrMapOvr>
+    <a:masterClrMapping/>
+  </p:clrMapOvr>
+</p:sld>
+</file>
+
+<file path=ppt/slides/slide36.xml><?xml version="1.0" encoding="utf-8"?>
+<p:sld xmlns:a="http://schemas.openxmlformats.org/drawingml/2006/main" xmlns:r="http://schemas.openxmlformats.org/officeDocument/2006/relationships" xmlns:p="http://schemas.openxmlformats.org/presentationml/2006/main">
+  <p:cSld>
+    <p:bg>
+      <p:bgPr>
+        <a:solidFill>
+          <a:srgbClr val="343540"/>
+        </a:solidFill>
+        <a:effectLst/>
+      </p:bgPr>
+    </p:bg>
+    <p:spTree>
+      <p:nvGrpSpPr>
+        <p:cNvPr id="1" name="">
+          <a:extLst>
+            <a:ext uri="{FF2B5EF4-FFF2-40B4-BE49-F238E27FC236}">
               <a16:creationId xmlns:a16="http://schemas.microsoft.com/office/drawing/2014/main" id="{64009A51-25EA-7578-7043-B86970923B3D}"/>
             </a:ext>
           </a:extLst>
@@ -13560,7 +13890,7 @@
 </p:sld>
 </file>
 
-<file path=ppt/slides/slide36.xml><?xml version="1.0" encoding="utf-8"?>
+<file path=ppt/slides/slide37.xml><?xml version="1.0" encoding="utf-8"?>
 <p:sld xmlns:a="http://schemas.openxmlformats.org/drawingml/2006/main" xmlns:r="http://schemas.openxmlformats.org/officeDocument/2006/relationships" xmlns:p="http://schemas.openxmlformats.org/presentationml/2006/main">
   <p:cSld>
     <p:bg>
@@ -13750,7 +14080,7 @@
 </p:sld>
 </file>
 
-<file path=ppt/slides/slide37.xml><?xml version="1.0" encoding="utf-8"?>
+<file path=ppt/slides/slide38.xml><?xml version="1.0" encoding="utf-8"?>
 <p:sld xmlns:a="http://schemas.openxmlformats.org/drawingml/2006/main" xmlns:r="http://schemas.openxmlformats.org/officeDocument/2006/relationships" xmlns:p="http://schemas.openxmlformats.org/presentationml/2006/main">
   <p:cSld>
     <p:bg>
@@ -14018,7 +14348,7 @@
 </p:sld>
 </file>
 
-<file path=ppt/slides/slide38.xml><?xml version="1.0" encoding="utf-8"?>
+<file path=ppt/slides/slide39.xml><?xml version="1.0" encoding="utf-8"?>
 <p:sld xmlns:a="http://schemas.openxmlformats.org/drawingml/2006/main" xmlns:r="http://schemas.openxmlformats.org/officeDocument/2006/relationships" xmlns:p="http://schemas.openxmlformats.org/presentationml/2006/main">
   <p:cSld>
     <p:bg>
@@ -14166,148 +14496,6 @@
     <p:extLst>
       <p:ext uri="{BB962C8B-B14F-4D97-AF65-F5344CB8AC3E}">
         <p14:creationId xmlns:p14="http://schemas.microsoft.com/office/powerpoint/2010/main" val="2332189591"/>
-      </p:ext>
-    </p:extLst>
-  </p:cSld>
-  <p:clrMapOvr>
-    <a:masterClrMapping/>
-  </p:clrMapOvr>
-</p:sld>
-</file>
-
-<file path=ppt/slides/slide39.xml><?xml version="1.0" encoding="utf-8"?>
-<p:sld xmlns:a="http://schemas.openxmlformats.org/drawingml/2006/main" xmlns:r="http://schemas.openxmlformats.org/officeDocument/2006/relationships" xmlns:p="http://schemas.openxmlformats.org/presentationml/2006/main">
-  <p:cSld>
-    <p:bg>
-      <p:bgPr>
-        <a:solidFill>
-          <a:srgbClr val="343540"/>
-        </a:solidFill>
-        <a:effectLst/>
-      </p:bgPr>
-    </p:bg>
-    <p:spTree>
-      <p:nvGrpSpPr>
-        <p:cNvPr id="1" name="">
-          <a:extLst>
-            <a:ext uri="{FF2B5EF4-FFF2-40B4-BE49-F238E27FC236}">
-              <a16:creationId xmlns:a16="http://schemas.microsoft.com/office/drawing/2014/main" id="{0813181B-D3B0-78EF-0C30-27E61D60A869}"/>
-            </a:ext>
-          </a:extLst>
-        </p:cNvPr>
-        <p:cNvGrpSpPr/>
-        <p:nvPr/>
-      </p:nvGrpSpPr>
-      <p:grpSpPr>
-        <a:xfrm>
-          <a:off x="0" y="0"/>
-          <a:ext cx="0" cy="0"/>
-          <a:chOff x="0" y="0"/>
-          <a:chExt cx="0" cy="0"/>
-        </a:xfrm>
-      </p:grpSpPr>
-      <p:sp>
-        <p:nvSpPr>
-          <p:cNvPr id="18" name="Title 1">
-            <a:extLst>
-              <a:ext uri="{FF2B5EF4-FFF2-40B4-BE49-F238E27FC236}">
-                <a16:creationId xmlns:a16="http://schemas.microsoft.com/office/drawing/2014/main" id="{8437BC3F-3478-0857-9807-70C838E8B524}"/>
-              </a:ext>
-            </a:extLst>
-          </p:cNvPr>
-          <p:cNvSpPr>
-            <a:spLocks noGrp="1"/>
-          </p:cNvSpPr>
-          <p:nvPr>
-            <p:ph type="ctrTitle"/>
-          </p:nvPr>
-        </p:nvSpPr>
-        <p:spPr>
-          <a:xfrm>
-            <a:off x="6004846" y="0"/>
-            <a:ext cx="6164073" cy="576982"/>
-          </a:xfrm>
-        </p:spPr>
-        <p:txBody>
-          <a:bodyPr>
-            <a:noAutofit/>
-          </a:bodyPr>
-          <a:lstStyle/>
-          <a:p>
-            <a:pPr algn="r"/>
-            <a:r>
-              <a:rPr lang="en-US" sz="3200" dirty="0">
-                <a:solidFill>
-                  <a:srgbClr val="FFC000"/>
-                </a:solidFill>
-              </a:rPr>
-              <a:t>… [</a:t>
-            </a:r>
-            <a:r>
-              <a:rPr lang="en-US" sz="3200" dirty="0">
-                <a:solidFill>
-                  <a:schemeClr val="accent3">
-                    <a:lumMod val="60000"/>
-                    <a:lumOff val="40000"/>
-                  </a:schemeClr>
-                </a:solidFill>
-              </a:rPr>
-              <a:t>….</a:t>
-            </a:r>
-            <a:r>
-              <a:rPr lang="en-US" sz="3200" dirty="0">
-                <a:solidFill>
-                  <a:srgbClr val="FFC000"/>
-                </a:solidFill>
-              </a:rPr>
-              <a:t>]……</a:t>
-            </a:r>
-          </a:p>
-        </p:txBody>
-      </p:sp>
-      <p:sp>
-        <p:nvSpPr>
-          <p:cNvPr id="3" name="TextBox 2">
-            <a:extLst>
-              <a:ext uri="{FF2B5EF4-FFF2-40B4-BE49-F238E27FC236}">
-                <a16:creationId xmlns:a16="http://schemas.microsoft.com/office/drawing/2014/main" id="{29F1F1AC-6561-4A89-FDAF-65FF81C786FE}"/>
-              </a:ext>
-            </a:extLst>
-          </p:cNvPr>
-          <p:cNvSpPr txBox="1"/>
-          <p:nvPr/>
-        </p:nvSpPr>
-        <p:spPr>
-          <a:xfrm>
-            <a:off x="5620549" y="3105834"/>
-            <a:ext cx="950901" cy="646331"/>
-          </a:xfrm>
-          <a:prstGeom prst="rect">
-            <a:avLst/>
-          </a:prstGeom>
-          <a:noFill/>
-        </p:spPr>
-        <p:txBody>
-          <a:bodyPr wrap="none" rtlCol="0">
-            <a:spAutoFit/>
-          </a:bodyPr>
-          <a:lstStyle/>
-          <a:p>
-            <a:r>
-              <a:rPr lang="en-US" sz="3600" dirty="0">
-                <a:solidFill>
-                  <a:schemeClr val="bg1"/>
-                </a:solidFill>
-              </a:rPr>
-              <a:t>YES</a:t>
-            </a:r>
-          </a:p>
-        </p:txBody>
-      </p:sp>
-    </p:spTree>
-    <p:extLst>
-      <p:ext uri="{BB962C8B-B14F-4D97-AF65-F5344CB8AC3E}">
-        <p14:creationId xmlns:p14="http://schemas.microsoft.com/office/powerpoint/2010/main" val="2515401011"/>
       </p:ext>
     </p:extLst>
   </p:cSld>
@@ -14752,6 +14940,148 @@
         <p:cNvPr id="1" name="">
           <a:extLst>
             <a:ext uri="{FF2B5EF4-FFF2-40B4-BE49-F238E27FC236}">
+              <a16:creationId xmlns:a16="http://schemas.microsoft.com/office/drawing/2014/main" id="{0813181B-D3B0-78EF-0C30-27E61D60A869}"/>
+            </a:ext>
+          </a:extLst>
+        </p:cNvPr>
+        <p:cNvGrpSpPr/>
+        <p:nvPr/>
+      </p:nvGrpSpPr>
+      <p:grpSpPr>
+        <a:xfrm>
+          <a:off x="0" y="0"/>
+          <a:ext cx="0" cy="0"/>
+          <a:chOff x="0" y="0"/>
+          <a:chExt cx="0" cy="0"/>
+        </a:xfrm>
+      </p:grpSpPr>
+      <p:sp>
+        <p:nvSpPr>
+          <p:cNvPr id="18" name="Title 1">
+            <a:extLst>
+              <a:ext uri="{FF2B5EF4-FFF2-40B4-BE49-F238E27FC236}">
+                <a16:creationId xmlns:a16="http://schemas.microsoft.com/office/drawing/2014/main" id="{8437BC3F-3478-0857-9807-70C838E8B524}"/>
+              </a:ext>
+            </a:extLst>
+          </p:cNvPr>
+          <p:cNvSpPr>
+            <a:spLocks noGrp="1"/>
+          </p:cNvSpPr>
+          <p:nvPr>
+            <p:ph type="ctrTitle"/>
+          </p:nvPr>
+        </p:nvSpPr>
+        <p:spPr>
+          <a:xfrm>
+            <a:off x="6004846" y="0"/>
+            <a:ext cx="6164073" cy="576982"/>
+          </a:xfrm>
+        </p:spPr>
+        <p:txBody>
+          <a:bodyPr>
+            <a:noAutofit/>
+          </a:bodyPr>
+          <a:lstStyle/>
+          <a:p>
+            <a:pPr algn="r"/>
+            <a:r>
+              <a:rPr lang="en-US" sz="3200" dirty="0">
+                <a:solidFill>
+                  <a:srgbClr val="FFC000"/>
+                </a:solidFill>
+              </a:rPr>
+              <a:t>… [</a:t>
+            </a:r>
+            <a:r>
+              <a:rPr lang="en-US" sz="3200" dirty="0">
+                <a:solidFill>
+                  <a:schemeClr val="accent3">
+                    <a:lumMod val="60000"/>
+                    <a:lumOff val="40000"/>
+                  </a:schemeClr>
+                </a:solidFill>
+              </a:rPr>
+              <a:t>….</a:t>
+            </a:r>
+            <a:r>
+              <a:rPr lang="en-US" sz="3200" dirty="0">
+                <a:solidFill>
+                  <a:srgbClr val="FFC000"/>
+                </a:solidFill>
+              </a:rPr>
+              <a:t>]……</a:t>
+            </a:r>
+          </a:p>
+        </p:txBody>
+      </p:sp>
+      <p:sp>
+        <p:nvSpPr>
+          <p:cNvPr id="3" name="TextBox 2">
+            <a:extLst>
+              <a:ext uri="{FF2B5EF4-FFF2-40B4-BE49-F238E27FC236}">
+                <a16:creationId xmlns:a16="http://schemas.microsoft.com/office/drawing/2014/main" id="{29F1F1AC-6561-4A89-FDAF-65FF81C786FE}"/>
+              </a:ext>
+            </a:extLst>
+          </p:cNvPr>
+          <p:cNvSpPr txBox="1"/>
+          <p:nvPr/>
+        </p:nvSpPr>
+        <p:spPr>
+          <a:xfrm>
+            <a:off x="5620549" y="3105834"/>
+            <a:ext cx="950901" cy="646331"/>
+          </a:xfrm>
+          <a:prstGeom prst="rect">
+            <a:avLst/>
+          </a:prstGeom>
+          <a:noFill/>
+        </p:spPr>
+        <p:txBody>
+          <a:bodyPr wrap="none" rtlCol="0">
+            <a:spAutoFit/>
+          </a:bodyPr>
+          <a:lstStyle/>
+          <a:p>
+            <a:r>
+              <a:rPr lang="en-US" sz="3600" dirty="0">
+                <a:solidFill>
+                  <a:schemeClr val="bg1"/>
+                </a:solidFill>
+              </a:rPr>
+              <a:t>YES</a:t>
+            </a:r>
+          </a:p>
+        </p:txBody>
+      </p:sp>
+    </p:spTree>
+    <p:extLst>
+      <p:ext uri="{BB962C8B-B14F-4D97-AF65-F5344CB8AC3E}">
+        <p14:creationId xmlns:p14="http://schemas.microsoft.com/office/powerpoint/2010/main" val="2515401011"/>
+      </p:ext>
+    </p:extLst>
+  </p:cSld>
+  <p:clrMapOvr>
+    <a:masterClrMapping/>
+  </p:clrMapOvr>
+</p:sld>
+</file>
+
+<file path=ppt/slides/slide41.xml><?xml version="1.0" encoding="utf-8"?>
+<p:sld xmlns:a="http://schemas.openxmlformats.org/drawingml/2006/main" xmlns:r="http://schemas.openxmlformats.org/officeDocument/2006/relationships" xmlns:p="http://schemas.openxmlformats.org/presentationml/2006/main">
+  <p:cSld>
+    <p:bg>
+      <p:bgPr>
+        <a:solidFill>
+          <a:srgbClr val="343540"/>
+        </a:solidFill>
+        <a:effectLst/>
+      </p:bgPr>
+    </p:bg>
+    <p:spTree>
+      <p:nvGrpSpPr>
+        <p:cNvPr id="1" name="">
+          <a:extLst>
+            <a:ext uri="{FF2B5EF4-FFF2-40B4-BE49-F238E27FC236}">
               <a16:creationId xmlns:a16="http://schemas.microsoft.com/office/drawing/2014/main" id="{DB4F5321-C3C5-AB4B-1728-3B91BAC4C63B}"/>
             </a:ext>
           </a:extLst>
@@ -14846,7 +15176,7 @@
 </p:sld>
 </file>
 
-<file path=ppt/slides/slide41.xml><?xml version="1.0" encoding="utf-8"?>
+<file path=ppt/slides/slide42.xml><?xml version="1.0" encoding="utf-8"?>
 <p:sld xmlns:a="http://schemas.openxmlformats.org/drawingml/2006/main" xmlns:r="http://schemas.openxmlformats.org/officeDocument/2006/relationships" xmlns:p="http://schemas.openxmlformats.org/presentationml/2006/main">
   <p:cSld>
     <p:bg>
@@ -15036,7 +15366,7 @@
 </p:sld>
 </file>
 
-<file path=ppt/slides/slide42.xml><?xml version="1.0" encoding="utf-8"?>
+<file path=ppt/slides/slide43.xml><?xml version="1.0" encoding="utf-8"?>
 <p:sld xmlns:a="http://schemas.openxmlformats.org/drawingml/2006/main" xmlns:r="http://schemas.openxmlformats.org/officeDocument/2006/relationships" xmlns:p="http://schemas.openxmlformats.org/presentationml/2006/main">
   <p:cSld>
     <p:bg>
@@ -15249,7 +15579,7 @@
 </p:sld>
 </file>
 
-<file path=ppt/slides/slide43.xml><?xml version="1.0" encoding="utf-8"?>
+<file path=ppt/slides/slide44.xml><?xml version="1.0" encoding="utf-8"?>
 <p:sld xmlns:a="http://schemas.openxmlformats.org/drawingml/2006/main" xmlns:r="http://schemas.openxmlformats.org/officeDocument/2006/relationships" xmlns:p="http://schemas.openxmlformats.org/presentationml/2006/main">
   <p:cSld>
     <p:bg>
@@ -15513,7 +15843,7 @@
 </p:sld>
 </file>
 
-<file path=ppt/slides/slide44.xml><?xml version="1.0" encoding="utf-8"?>
+<file path=ppt/slides/slide45.xml><?xml version="1.0" encoding="utf-8"?>
 <p:sld xmlns:a="http://schemas.openxmlformats.org/drawingml/2006/main" xmlns:r="http://schemas.openxmlformats.org/officeDocument/2006/relationships" xmlns:p="http://schemas.openxmlformats.org/presentationml/2006/main">
   <p:cSld>
     <p:bg>
@@ -15673,7 +16003,7 @@
 </p:sld>
 </file>
 
-<file path=ppt/slides/slide45.xml><?xml version="1.0" encoding="utf-8"?>
+<file path=ppt/slides/slide46.xml><?xml version="1.0" encoding="utf-8"?>
 <p:sld xmlns:a="http://schemas.openxmlformats.org/drawingml/2006/main" xmlns:r="http://schemas.openxmlformats.org/officeDocument/2006/relationships" xmlns:p="http://schemas.openxmlformats.org/presentationml/2006/main">
   <p:cSld>
     <p:bg>
@@ -15910,7 +16240,7 @@
 </p:sld>
 </file>
 
-<file path=ppt/slides/slide46.xml><?xml version="1.0" encoding="utf-8"?>
+<file path=ppt/slides/slide47.xml><?xml version="1.0" encoding="utf-8"?>
 <p:sld xmlns:a="http://schemas.openxmlformats.org/drawingml/2006/main" xmlns:r="http://schemas.openxmlformats.org/officeDocument/2006/relationships" xmlns:p="http://schemas.openxmlformats.org/presentationml/2006/main">
   <p:cSld>
     <p:bg>
@@ -16145,7 +16475,7 @@
 </p:sld>
 </file>
 
-<file path=ppt/slides/slide47.xml><?xml version="1.0" encoding="utf-8"?>
+<file path=ppt/slides/slide48.xml><?xml version="1.0" encoding="utf-8"?>
 <p:sld xmlns:a="http://schemas.openxmlformats.org/drawingml/2006/main" xmlns:r="http://schemas.openxmlformats.org/officeDocument/2006/relationships" xmlns:p="http://schemas.openxmlformats.org/presentationml/2006/main">
   <p:cSld>
     <p:bg>
@@ -17188,7 +17518,7 @@
 </p:sld>
 </file>
 
-<file path=ppt/slides/slide48.xml><?xml version="1.0" encoding="utf-8"?>
+<file path=ppt/slides/slide49.xml><?xml version="1.0" encoding="utf-8"?>
 <p:sld xmlns:a="http://schemas.openxmlformats.org/drawingml/2006/main" xmlns:r="http://schemas.openxmlformats.org/officeDocument/2006/relationships" xmlns:p="http://schemas.openxmlformats.org/presentationml/2006/main">
   <p:cSld>
     <p:bg>
@@ -17376,419 +17706,6 @@
     <p:extLst>
       <p:ext uri="{BB962C8B-B14F-4D97-AF65-F5344CB8AC3E}">
         <p14:creationId xmlns:p14="http://schemas.microsoft.com/office/powerpoint/2010/main" val="2853277395"/>
-      </p:ext>
-    </p:extLst>
-  </p:cSld>
-  <p:clrMapOvr>
-    <a:masterClrMapping/>
-  </p:clrMapOvr>
-</p:sld>
-</file>
-
-<file path=ppt/slides/slide49.xml><?xml version="1.0" encoding="utf-8"?>
-<p:sld xmlns:a="http://schemas.openxmlformats.org/drawingml/2006/main" xmlns:r="http://schemas.openxmlformats.org/officeDocument/2006/relationships" xmlns:p="http://schemas.openxmlformats.org/presentationml/2006/main">
-  <p:cSld>
-    <p:bg>
-      <p:bgPr>
-        <a:solidFill>
-          <a:srgbClr val="343540"/>
-        </a:solidFill>
-        <a:effectLst/>
-      </p:bgPr>
-    </p:bg>
-    <p:spTree>
-      <p:nvGrpSpPr>
-        <p:cNvPr id="1" name="">
-          <a:extLst>
-            <a:ext uri="{FF2B5EF4-FFF2-40B4-BE49-F238E27FC236}">
-              <a16:creationId xmlns:a16="http://schemas.microsoft.com/office/drawing/2014/main" id="{066D8EF4-0792-A467-C076-9AE41C6E210C}"/>
-            </a:ext>
-          </a:extLst>
-        </p:cNvPr>
-        <p:cNvGrpSpPr/>
-        <p:nvPr/>
-      </p:nvGrpSpPr>
-      <p:grpSpPr>
-        <a:xfrm>
-          <a:off x="0" y="0"/>
-          <a:ext cx="0" cy="0"/>
-          <a:chOff x="0" y="0"/>
-          <a:chExt cx="0" cy="0"/>
-        </a:xfrm>
-      </p:grpSpPr>
-      <p:sp>
-        <p:nvSpPr>
-          <p:cNvPr id="18" name="Title 1">
-            <a:extLst>
-              <a:ext uri="{FF2B5EF4-FFF2-40B4-BE49-F238E27FC236}">
-                <a16:creationId xmlns:a16="http://schemas.microsoft.com/office/drawing/2014/main" id="{8BCF0867-E195-9D56-01BF-D78E45BA3C94}"/>
-              </a:ext>
-            </a:extLst>
-          </p:cNvPr>
-          <p:cNvSpPr>
-            <a:spLocks noGrp="1"/>
-          </p:cNvSpPr>
-          <p:nvPr>
-            <p:ph type="ctrTitle"/>
-          </p:nvPr>
-        </p:nvSpPr>
-        <p:spPr>
-          <a:xfrm>
-            <a:off x="6574422" y="-140043"/>
-            <a:ext cx="6164073" cy="576982"/>
-          </a:xfrm>
-        </p:spPr>
-        <p:txBody>
-          <a:bodyPr>
-            <a:noAutofit/>
-          </a:bodyPr>
-          <a:lstStyle/>
-          <a:p>
-            <a:r>
-              <a:rPr lang="en-US" sz="2400" dirty="0">
-                <a:solidFill>
-                  <a:srgbClr val="FFC000"/>
-                </a:solidFill>
-              </a:rPr>
-              <a:t>OP.OVER-LOADING [</a:t>
-            </a:r>
-            <a:r>
-              <a:rPr lang="en-US" sz="2400" dirty="0">
-                <a:solidFill>
-                  <a:schemeClr val="accent3">
-                    <a:lumMod val="60000"/>
-                    <a:lumOff val="40000"/>
-                  </a:schemeClr>
-                </a:solidFill>
-              </a:rPr>
-              <a:t>TRY THESE ??</a:t>
-            </a:r>
-            <a:r>
-              <a:rPr lang="en-US" sz="2400" dirty="0">
-                <a:solidFill>
-                  <a:srgbClr val="FFC000"/>
-                </a:solidFill>
-              </a:rPr>
-              <a:t>]……</a:t>
-            </a:r>
-          </a:p>
-        </p:txBody>
-      </p:sp>
-      <p:pic>
-        <p:nvPicPr>
-          <p:cNvPr id="4" name="Picture 3">
-            <a:extLst>
-              <a:ext uri="{FF2B5EF4-FFF2-40B4-BE49-F238E27FC236}">
-                <a16:creationId xmlns:a16="http://schemas.microsoft.com/office/drawing/2014/main" id="{B3B4FC1E-702B-9088-E233-5AA434933871}"/>
-              </a:ext>
-            </a:extLst>
-          </p:cNvPr>
-          <p:cNvPicPr>
-            <a:picLocks noChangeAspect="1"/>
-          </p:cNvPicPr>
-          <p:nvPr/>
-        </p:nvPicPr>
-        <p:blipFill>
-          <a:blip r:embed="rId3"/>
-          <a:stretch>
-            <a:fillRect/>
-          </a:stretch>
-        </p:blipFill>
-        <p:spPr>
-          <a:xfrm>
-            <a:off x="145878" y="247134"/>
-            <a:ext cx="3680061" cy="2891477"/>
-          </a:xfrm>
-          <a:prstGeom prst="roundRect">
-            <a:avLst>
-              <a:gd name="adj" fmla="val 4545"/>
-            </a:avLst>
-          </a:prstGeom>
-          <a:ln>
-            <a:noFill/>
-          </a:ln>
-          <a:effectLst>
-            <a:outerShdw blurRad="76200" dist="38100" dir="7800000" algn="tl" rotWithShape="0">
-              <a:srgbClr val="000000">
-                <a:alpha val="40000"/>
-              </a:srgbClr>
-            </a:outerShdw>
-          </a:effectLst>
-          <a:scene3d>
-            <a:camera prst="orthographicFront"/>
-            <a:lightRig rig="contrasting" dir="t">
-              <a:rot lat="0" lon="0" rev="4200000"/>
-            </a:lightRig>
-          </a:scene3d>
-          <a:sp3d prstMaterial="plastic">
-            <a:bevelT w="381000" h="114300" prst="relaxedInset"/>
-            <a:contourClr>
-              <a:srgbClr val="969696"/>
-            </a:contourClr>
-          </a:sp3d>
-        </p:spPr>
-      </p:pic>
-      <p:pic>
-        <p:nvPicPr>
-          <p:cNvPr id="5" name="Picture 4">
-            <a:extLst>
-              <a:ext uri="{FF2B5EF4-FFF2-40B4-BE49-F238E27FC236}">
-                <a16:creationId xmlns:a16="http://schemas.microsoft.com/office/drawing/2014/main" id="{16CCABAB-664E-B085-A4DF-3BA473C9D429}"/>
-              </a:ext>
-            </a:extLst>
-          </p:cNvPr>
-          <p:cNvPicPr>
-            <a:picLocks noChangeAspect="1"/>
-          </p:cNvPicPr>
-          <p:nvPr/>
-        </p:nvPicPr>
-        <p:blipFill>
-          <a:blip r:embed="rId4"/>
-          <a:stretch>
-            <a:fillRect/>
-          </a:stretch>
-        </p:blipFill>
-        <p:spPr>
-          <a:xfrm>
-            <a:off x="8233675" y="576312"/>
-            <a:ext cx="3632502" cy="5808012"/>
-          </a:xfrm>
-          <a:prstGeom prst="roundRect">
-            <a:avLst>
-              <a:gd name="adj" fmla="val 1699"/>
-            </a:avLst>
-          </a:prstGeom>
-          <a:ln>
-            <a:noFill/>
-          </a:ln>
-          <a:effectLst>
-            <a:outerShdw blurRad="76200" dist="38100" dir="7800000" algn="tl" rotWithShape="0">
-              <a:srgbClr val="000000">
-                <a:alpha val="40000"/>
-              </a:srgbClr>
-            </a:outerShdw>
-          </a:effectLst>
-          <a:scene3d>
-            <a:camera prst="orthographicFront"/>
-            <a:lightRig rig="contrasting" dir="t">
-              <a:rot lat="0" lon="0" rev="4200000"/>
-            </a:lightRig>
-          </a:scene3d>
-          <a:sp3d prstMaterial="plastic">
-            <a:bevelT w="381000" h="114300" prst="relaxedInset"/>
-            <a:contourClr>
-              <a:srgbClr val="969696"/>
-            </a:contourClr>
-          </a:sp3d>
-        </p:spPr>
-      </p:pic>
-      <p:pic>
-        <p:nvPicPr>
-          <p:cNvPr id="6" name="Picture 5">
-            <a:extLst>
-              <a:ext uri="{FF2B5EF4-FFF2-40B4-BE49-F238E27FC236}">
-                <a16:creationId xmlns:a16="http://schemas.microsoft.com/office/drawing/2014/main" id="{C2276FDE-664F-8753-6E23-E48D776EACA5}"/>
-              </a:ext>
-            </a:extLst>
-          </p:cNvPr>
-          <p:cNvPicPr>
-            <a:picLocks noChangeAspect="1"/>
-          </p:cNvPicPr>
-          <p:nvPr/>
-        </p:nvPicPr>
-        <p:blipFill>
-          <a:blip r:embed="rId5"/>
-          <a:stretch>
-            <a:fillRect/>
-          </a:stretch>
-        </p:blipFill>
-        <p:spPr>
-          <a:xfrm>
-            <a:off x="4149701" y="2892686"/>
-            <a:ext cx="3694640" cy="3491638"/>
-          </a:xfrm>
-          <a:prstGeom prst="roundRect">
-            <a:avLst>
-              <a:gd name="adj" fmla="val 1205"/>
-            </a:avLst>
-          </a:prstGeom>
-          <a:ln>
-            <a:noFill/>
-          </a:ln>
-          <a:effectLst>
-            <a:outerShdw blurRad="76200" dist="38100" dir="7800000" algn="tl" rotWithShape="0">
-              <a:srgbClr val="000000">
-                <a:alpha val="40000"/>
-              </a:srgbClr>
-            </a:outerShdw>
-          </a:effectLst>
-          <a:scene3d>
-            <a:camera prst="orthographicFront"/>
-            <a:lightRig rig="contrasting" dir="t">
-              <a:rot lat="0" lon="0" rev="4200000"/>
-            </a:lightRig>
-          </a:scene3d>
-          <a:sp3d prstMaterial="plastic">
-            <a:bevelT w="381000" h="114300" prst="relaxedInset"/>
-            <a:contourClr>
-              <a:srgbClr val="969696"/>
-            </a:contourClr>
-          </a:sp3d>
-        </p:spPr>
-      </p:pic>
-      <p:pic>
-        <p:nvPicPr>
-          <p:cNvPr id="7" name="Picture 6">
-            <a:extLst>
-              <a:ext uri="{FF2B5EF4-FFF2-40B4-BE49-F238E27FC236}">
-                <a16:creationId xmlns:a16="http://schemas.microsoft.com/office/drawing/2014/main" id="{689418CF-4715-2F17-09C5-76586162551A}"/>
-              </a:ext>
-            </a:extLst>
-          </p:cNvPr>
-          <p:cNvPicPr>
-            <a:picLocks noChangeAspect="1"/>
-          </p:cNvPicPr>
-          <p:nvPr/>
-        </p:nvPicPr>
-        <p:blipFill>
-          <a:blip r:embed="rId6"/>
-          <a:stretch>
-            <a:fillRect/>
-          </a:stretch>
-        </p:blipFill>
-        <p:spPr>
-          <a:xfrm>
-            <a:off x="250730" y="4209196"/>
-            <a:ext cx="3665493" cy="2175128"/>
-          </a:xfrm>
-          <a:prstGeom prst="roundRect">
-            <a:avLst>
-              <a:gd name="adj" fmla="val 2561"/>
-            </a:avLst>
-          </a:prstGeom>
-          <a:ln>
-            <a:noFill/>
-          </a:ln>
-          <a:effectLst>
-            <a:outerShdw blurRad="76200" dist="38100" dir="7800000" algn="tl" rotWithShape="0">
-              <a:srgbClr val="000000">
-                <a:alpha val="40000"/>
-              </a:srgbClr>
-            </a:outerShdw>
-          </a:effectLst>
-          <a:scene3d>
-            <a:camera prst="orthographicFront"/>
-            <a:lightRig rig="contrasting" dir="t">
-              <a:rot lat="0" lon="0" rev="4200000"/>
-            </a:lightRig>
-          </a:scene3d>
-          <a:sp3d prstMaterial="plastic">
-            <a:bevelT w="381000" h="114300" prst="relaxedInset"/>
-            <a:contourClr>
-              <a:srgbClr val="969696"/>
-            </a:contourClr>
-          </a:sp3d>
-        </p:spPr>
-      </p:pic>
-      <p:sp>
-        <p:nvSpPr>
-          <p:cNvPr id="9" name="Title 1">
-            <a:extLst>
-              <a:ext uri="{FF2B5EF4-FFF2-40B4-BE49-F238E27FC236}">
-                <a16:creationId xmlns:a16="http://schemas.microsoft.com/office/drawing/2014/main" id="{C10BAC3B-F37A-B08C-760F-049781F51657}"/>
-              </a:ext>
-            </a:extLst>
-          </p:cNvPr>
-          <p:cNvSpPr txBox="1">
-            <a:spLocks/>
-          </p:cNvSpPr>
-          <p:nvPr/>
-        </p:nvSpPr>
-        <p:spPr>
-          <a:xfrm>
-            <a:off x="2791639" y="1243944"/>
-            <a:ext cx="6608721" cy="1113449"/>
-          </a:xfrm>
-          <a:prstGeom prst="rect">
-            <a:avLst/>
-          </a:prstGeom>
-        </p:spPr>
-        <p:txBody>
-          <a:bodyPr vert="horz" lIns="91440" tIns="45720" rIns="91440" bIns="45720" rtlCol="0" anchor="b">
-            <a:normAutofit fontScale="70000" lnSpcReduction="20000"/>
-          </a:bodyPr>
-          <a:lstStyle>
-            <a:lvl1pPr algn="ctr" defTabSz="914400" rtl="0" eaLnBrk="1" latinLnBrk="0" hangingPunct="1">
-              <a:lnSpc>
-                <a:spcPct val="90000"/>
-              </a:lnSpc>
-              <a:spcBef>
-                <a:spcPct val="0"/>
-              </a:spcBef>
-              <a:buNone/>
-              <a:defRPr sz="6000" kern="1200">
-                <a:solidFill>
-                  <a:schemeClr val="tx1"/>
-                </a:solidFill>
-                <a:latin typeface="+mj-lt"/>
-                <a:ea typeface="+mj-ea"/>
-                <a:cs typeface="+mj-cs"/>
-              </a:defRPr>
-            </a:lvl1pPr>
-          </a:lstStyle>
-          <a:p>
-            <a:r>
-              <a:rPr lang="en-US" sz="2400" dirty="0">
-                <a:solidFill>
-                  <a:srgbClr val="FFC000"/>
-                </a:solidFill>
-              </a:rPr>
-              <a:t> I GAVE YOU THE RECIEPE</a:t>
-            </a:r>
-          </a:p>
-          <a:p>
-            <a:r>
-              <a:rPr lang="en-US" sz="2400" dirty="0">
-                <a:solidFill>
-                  <a:srgbClr val="FFC000"/>
-                </a:solidFill>
-              </a:rPr>
-              <a:t>NOW BE THE CHEF…</a:t>
-            </a:r>
-          </a:p>
-          <a:p>
-            <a:r>
-              <a:rPr lang="en-US" sz="2400" dirty="0">
-                <a:solidFill>
-                  <a:srgbClr val="FFC000"/>
-                </a:solidFill>
-              </a:rPr>
-              <a:t>…check if all of these are valid?</a:t>
-            </a:r>
-          </a:p>
-          <a:p>
-            <a:endParaRPr lang="en-US" sz="2400" dirty="0">
-              <a:solidFill>
-                <a:srgbClr val="FFC000"/>
-              </a:solidFill>
-            </a:endParaRPr>
-          </a:p>
-          <a:p>
-            <a:r>
-              <a:rPr lang="en-US" sz="2400" dirty="0">
-                <a:solidFill>
-                  <a:srgbClr val="FFC000"/>
-                </a:solidFill>
-              </a:rPr>
-              <a:t>FIGURE OUT WHAT IS NOT POSSIBLE</a:t>
-            </a:r>
-          </a:p>
-        </p:txBody>
-      </p:sp>
-    </p:spTree>
-    <p:extLst>
-      <p:ext uri="{BB962C8B-B14F-4D97-AF65-F5344CB8AC3E}">
-        <p14:creationId xmlns:p14="http://schemas.microsoft.com/office/powerpoint/2010/main" val="2874532621"/>
       </p:ext>
     </p:extLst>
   </p:cSld>
@@ -18187,6 +18104,419 @@
 </file>
 
 <file path=ppt/slides/slide50.xml><?xml version="1.0" encoding="utf-8"?>
+<p:sld xmlns:a="http://schemas.openxmlformats.org/drawingml/2006/main" xmlns:r="http://schemas.openxmlformats.org/officeDocument/2006/relationships" xmlns:p="http://schemas.openxmlformats.org/presentationml/2006/main">
+  <p:cSld>
+    <p:bg>
+      <p:bgPr>
+        <a:solidFill>
+          <a:srgbClr val="343540"/>
+        </a:solidFill>
+        <a:effectLst/>
+      </p:bgPr>
+    </p:bg>
+    <p:spTree>
+      <p:nvGrpSpPr>
+        <p:cNvPr id="1" name="">
+          <a:extLst>
+            <a:ext uri="{FF2B5EF4-FFF2-40B4-BE49-F238E27FC236}">
+              <a16:creationId xmlns:a16="http://schemas.microsoft.com/office/drawing/2014/main" id="{066D8EF4-0792-A467-C076-9AE41C6E210C}"/>
+            </a:ext>
+          </a:extLst>
+        </p:cNvPr>
+        <p:cNvGrpSpPr/>
+        <p:nvPr/>
+      </p:nvGrpSpPr>
+      <p:grpSpPr>
+        <a:xfrm>
+          <a:off x="0" y="0"/>
+          <a:ext cx="0" cy="0"/>
+          <a:chOff x="0" y="0"/>
+          <a:chExt cx="0" cy="0"/>
+        </a:xfrm>
+      </p:grpSpPr>
+      <p:sp>
+        <p:nvSpPr>
+          <p:cNvPr id="18" name="Title 1">
+            <a:extLst>
+              <a:ext uri="{FF2B5EF4-FFF2-40B4-BE49-F238E27FC236}">
+                <a16:creationId xmlns:a16="http://schemas.microsoft.com/office/drawing/2014/main" id="{8BCF0867-E195-9D56-01BF-D78E45BA3C94}"/>
+              </a:ext>
+            </a:extLst>
+          </p:cNvPr>
+          <p:cNvSpPr>
+            <a:spLocks noGrp="1"/>
+          </p:cNvSpPr>
+          <p:nvPr>
+            <p:ph type="ctrTitle"/>
+          </p:nvPr>
+        </p:nvSpPr>
+        <p:spPr>
+          <a:xfrm>
+            <a:off x="6574422" y="-140043"/>
+            <a:ext cx="6164073" cy="576982"/>
+          </a:xfrm>
+        </p:spPr>
+        <p:txBody>
+          <a:bodyPr>
+            <a:noAutofit/>
+          </a:bodyPr>
+          <a:lstStyle/>
+          <a:p>
+            <a:r>
+              <a:rPr lang="en-US" sz="2400" dirty="0">
+                <a:solidFill>
+                  <a:srgbClr val="FFC000"/>
+                </a:solidFill>
+              </a:rPr>
+              <a:t>OP.OVER-LOADING [</a:t>
+            </a:r>
+            <a:r>
+              <a:rPr lang="en-US" sz="2400" dirty="0">
+                <a:solidFill>
+                  <a:schemeClr val="accent3">
+                    <a:lumMod val="60000"/>
+                    <a:lumOff val="40000"/>
+                  </a:schemeClr>
+                </a:solidFill>
+              </a:rPr>
+              <a:t>TRY THESE ??</a:t>
+            </a:r>
+            <a:r>
+              <a:rPr lang="en-US" sz="2400" dirty="0">
+                <a:solidFill>
+                  <a:srgbClr val="FFC000"/>
+                </a:solidFill>
+              </a:rPr>
+              <a:t>]……</a:t>
+            </a:r>
+          </a:p>
+        </p:txBody>
+      </p:sp>
+      <p:pic>
+        <p:nvPicPr>
+          <p:cNvPr id="4" name="Picture 3">
+            <a:extLst>
+              <a:ext uri="{FF2B5EF4-FFF2-40B4-BE49-F238E27FC236}">
+                <a16:creationId xmlns:a16="http://schemas.microsoft.com/office/drawing/2014/main" id="{B3B4FC1E-702B-9088-E233-5AA434933871}"/>
+              </a:ext>
+            </a:extLst>
+          </p:cNvPr>
+          <p:cNvPicPr>
+            <a:picLocks noChangeAspect="1"/>
+          </p:cNvPicPr>
+          <p:nvPr/>
+        </p:nvPicPr>
+        <p:blipFill>
+          <a:blip r:embed="rId3"/>
+          <a:stretch>
+            <a:fillRect/>
+          </a:stretch>
+        </p:blipFill>
+        <p:spPr>
+          <a:xfrm>
+            <a:off x="145878" y="247134"/>
+            <a:ext cx="3680061" cy="2891477"/>
+          </a:xfrm>
+          <a:prstGeom prst="roundRect">
+            <a:avLst>
+              <a:gd name="adj" fmla="val 4545"/>
+            </a:avLst>
+          </a:prstGeom>
+          <a:ln>
+            <a:noFill/>
+          </a:ln>
+          <a:effectLst>
+            <a:outerShdw blurRad="76200" dist="38100" dir="7800000" algn="tl" rotWithShape="0">
+              <a:srgbClr val="000000">
+                <a:alpha val="40000"/>
+              </a:srgbClr>
+            </a:outerShdw>
+          </a:effectLst>
+          <a:scene3d>
+            <a:camera prst="orthographicFront"/>
+            <a:lightRig rig="contrasting" dir="t">
+              <a:rot lat="0" lon="0" rev="4200000"/>
+            </a:lightRig>
+          </a:scene3d>
+          <a:sp3d prstMaterial="plastic">
+            <a:bevelT w="381000" h="114300" prst="relaxedInset"/>
+            <a:contourClr>
+              <a:srgbClr val="969696"/>
+            </a:contourClr>
+          </a:sp3d>
+        </p:spPr>
+      </p:pic>
+      <p:pic>
+        <p:nvPicPr>
+          <p:cNvPr id="5" name="Picture 4">
+            <a:extLst>
+              <a:ext uri="{FF2B5EF4-FFF2-40B4-BE49-F238E27FC236}">
+                <a16:creationId xmlns:a16="http://schemas.microsoft.com/office/drawing/2014/main" id="{16CCABAB-664E-B085-A4DF-3BA473C9D429}"/>
+              </a:ext>
+            </a:extLst>
+          </p:cNvPr>
+          <p:cNvPicPr>
+            <a:picLocks noChangeAspect="1"/>
+          </p:cNvPicPr>
+          <p:nvPr/>
+        </p:nvPicPr>
+        <p:blipFill>
+          <a:blip r:embed="rId4"/>
+          <a:stretch>
+            <a:fillRect/>
+          </a:stretch>
+        </p:blipFill>
+        <p:spPr>
+          <a:xfrm>
+            <a:off x="8233675" y="576312"/>
+            <a:ext cx="3632502" cy="5808012"/>
+          </a:xfrm>
+          <a:prstGeom prst="roundRect">
+            <a:avLst>
+              <a:gd name="adj" fmla="val 1699"/>
+            </a:avLst>
+          </a:prstGeom>
+          <a:ln>
+            <a:noFill/>
+          </a:ln>
+          <a:effectLst>
+            <a:outerShdw blurRad="76200" dist="38100" dir="7800000" algn="tl" rotWithShape="0">
+              <a:srgbClr val="000000">
+                <a:alpha val="40000"/>
+              </a:srgbClr>
+            </a:outerShdw>
+          </a:effectLst>
+          <a:scene3d>
+            <a:camera prst="orthographicFront"/>
+            <a:lightRig rig="contrasting" dir="t">
+              <a:rot lat="0" lon="0" rev="4200000"/>
+            </a:lightRig>
+          </a:scene3d>
+          <a:sp3d prstMaterial="plastic">
+            <a:bevelT w="381000" h="114300" prst="relaxedInset"/>
+            <a:contourClr>
+              <a:srgbClr val="969696"/>
+            </a:contourClr>
+          </a:sp3d>
+        </p:spPr>
+      </p:pic>
+      <p:pic>
+        <p:nvPicPr>
+          <p:cNvPr id="6" name="Picture 5">
+            <a:extLst>
+              <a:ext uri="{FF2B5EF4-FFF2-40B4-BE49-F238E27FC236}">
+                <a16:creationId xmlns:a16="http://schemas.microsoft.com/office/drawing/2014/main" id="{C2276FDE-664F-8753-6E23-E48D776EACA5}"/>
+              </a:ext>
+            </a:extLst>
+          </p:cNvPr>
+          <p:cNvPicPr>
+            <a:picLocks noChangeAspect="1"/>
+          </p:cNvPicPr>
+          <p:nvPr/>
+        </p:nvPicPr>
+        <p:blipFill>
+          <a:blip r:embed="rId5"/>
+          <a:stretch>
+            <a:fillRect/>
+          </a:stretch>
+        </p:blipFill>
+        <p:spPr>
+          <a:xfrm>
+            <a:off x="4149701" y="2892686"/>
+            <a:ext cx="3694640" cy="3491638"/>
+          </a:xfrm>
+          <a:prstGeom prst="roundRect">
+            <a:avLst>
+              <a:gd name="adj" fmla="val 1205"/>
+            </a:avLst>
+          </a:prstGeom>
+          <a:ln>
+            <a:noFill/>
+          </a:ln>
+          <a:effectLst>
+            <a:outerShdw blurRad="76200" dist="38100" dir="7800000" algn="tl" rotWithShape="0">
+              <a:srgbClr val="000000">
+                <a:alpha val="40000"/>
+              </a:srgbClr>
+            </a:outerShdw>
+          </a:effectLst>
+          <a:scene3d>
+            <a:camera prst="orthographicFront"/>
+            <a:lightRig rig="contrasting" dir="t">
+              <a:rot lat="0" lon="0" rev="4200000"/>
+            </a:lightRig>
+          </a:scene3d>
+          <a:sp3d prstMaterial="plastic">
+            <a:bevelT w="381000" h="114300" prst="relaxedInset"/>
+            <a:contourClr>
+              <a:srgbClr val="969696"/>
+            </a:contourClr>
+          </a:sp3d>
+        </p:spPr>
+      </p:pic>
+      <p:pic>
+        <p:nvPicPr>
+          <p:cNvPr id="7" name="Picture 6">
+            <a:extLst>
+              <a:ext uri="{FF2B5EF4-FFF2-40B4-BE49-F238E27FC236}">
+                <a16:creationId xmlns:a16="http://schemas.microsoft.com/office/drawing/2014/main" id="{689418CF-4715-2F17-09C5-76586162551A}"/>
+              </a:ext>
+            </a:extLst>
+          </p:cNvPr>
+          <p:cNvPicPr>
+            <a:picLocks noChangeAspect="1"/>
+          </p:cNvPicPr>
+          <p:nvPr/>
+        </p:nvPicPr>
+        <p:blipFill>
+          <a:blip r:embed="rId6"/>
+          <a:stretch>
+            <a:fillRect/>
+          </a:stretch>
+        </p:blipFill>
+        <p:spPr>
+          <a:xfrm>
+            <a:off x="250730" y="4209196"/>
+            <a:ext cx="3665493" cy="2175128"/>
+          </a:xfrm>
+          <a:prstGeom prst="roundRect">
+            <a:avLst>
+              <a:gd name="adj" fmla="val 2561"/>
+            </a:avLst>
+          </a:prstGeom>
+          <a:ln>
+            <a:noFill/>
+          </a:ln>
+          <a:effectLst>
+            <a:outerShdw blurRad="76200" dist="38100" dir="7800000" algn="tl" rotWithShape="0">
+              <a:srgbClr val="000000">
+                <a:alpha val="40000"/>
+              </a:srgbClr>
+            </a:outerShdw>
+          </a:effectLst>
+          <a:scene3d>
+            <a:camera prst="orthographicFront"/>
+            <a:lightRig rig="contrasting" dir="t">
+              <a:rot lat="0" lon="0" rev="4200000"/>
+            </a:lightRig>
+          </a:scene3d>
+          <a:sp3d prstMaterial="plastic">
+            <a:bevelT w="381000" h="114300" prst="relaxedInset"/>
+            <a:contourClr>
+              <a:srgbClr val="969696"/>
+            </a:contourClr>
+          </a:sp3d>
+        </p:spPr>
+      </p:pic>
+      <p:sp>
+        <p:nvSpPr>
+          <p:cNvPr id="9" name="Title 1">
+            <a:extLst>
+              <a:ext uri="{FF2B5EF4-FFF2-40B4-BE49-F238E27FC236}">
+                <a16:creationId xmlns:a16="http://schemas.microsoft.com/office/drawing/2014/main" id="{C10BAC3B-F37A-B08C-760F-049781F51657}"/>
+              </a:ext>
+            </a:extLst>
+          </p:cNvPr>
+          <p:cNvSpPr txBox="1">
+            <a:spLocks/>
+          </p:cNvSpPr>
+          <p:nvPr/>
+        </p:nvSpPr>
+        <p:spPr>
+          <a:xfrm>
+            <a:off x="2791639" y="1243944"/>
+            <a:ext cx="6608721" cy="1113449"/>
+          </a:xfrm>
+          <a:prstGeom prst="rect">
+            <a:avLst/>
+          </a:prstGeom>
+        </p:spPr>
+        <p:txBody>
+          <a:bodyPr vert="horz" lIns="91440" tIns="45720" rIns="91440" bIns="45720" rtlCol="0" anchor="b">
+            <a:normAutofit fontScale="70000" lnSpcReduction="20000"/>
+          </a:bodyPr>
+          <a:lstStyle>
+            <a:lvl1pPr algn="ctr" defTabSz="914400" rtl="0" eaLnBrk="1" latinLnBrk="0" hangingPunct="1">
+              <a:lnSpc>
+                <a:spcPct val="90000"/>
+              </a:lnSpc>
+              <a:spcBef>
+                <a:spcPct val="0"/>
+              </a:spcBef>
+              <a:buNone/>
+              <a:defRPr sz="6000" kern="1200">
+                <a:solidFill>
+                  <a:schemeClr val="tx1"/>
+                </a:solidFill>
+                <a:latin typeface="+mj-lt"/>
+                <a:ea typeface="+mj-ea"/>
+                <a:cs typeface="+mj-cs"/>
+              </a:defRPr>
+            </a:lvl1pPr>
+          </a:lstStyle>
+          <a:p>
+            <a:r>
+              <a:rPr lang="en-US" sz="2400" dirty="0">
+                <a:solidFill>
+                  <a:srgbClr val="FFC000"/>
+                </a:solidFill>
+              </a:rPr>
+              <a:t> I GAVE YOU THE RECIEPE</a:t>
+            </a:r>
+          </a:p>
+          <a:p>
+            <a:r>
+              <a:rPr lang="en-US" sz="2400" dirty="0">
+                <a:solidFill>
+                  <a:srgbClr val="FFC000"/>
+                </a:solidFill>
+              </a:rPr>
+              <a:t>NOW BE THE CHEF…</a:t>
+            </a:r>
+          </a:p>
+          <a:p>
+            <a:r>
+              <a:rPr lang="en-US" sz="2400" dirty="0">
+                <a:solidFill>
+                  <a:srgbClr val="FFC000"/>
+                </a:solidFill>
+              </a:rPr>
+              <a:t>…check if all of these are valid?</a:t>
+            </a:r>
+          </a:p>
+          <a:p>
+            <a:endParaRPr lang="en-US" sz="2400" dirty="0">
+              <a:solidFill>
+                <a:srgbClr val="FFC000"/>
+              </a:solidFill>
+            </a:endParaRPr>
+          </a:p>
+          <a:p>
+            <a:r>
+              <a:rPr lang="en-US" sz="2400" dirty="0">
+                <a:solidFill>
+                  <a:srgbClr val="FFC000"/>
+                </a:solidFill>
+              </a:rPr>
+              <a:t>FIGURE OUT WHAT IS NOT POSSIBLE</a:t>
+            </a:r>
+          </a:p>
+        </p:txBody>
+      </p:sp>
+    </p:spTree>
+    <p:extLst>
+      <p:ext uri="{BB962C8B-B14F-4D97-AF65-F5344CB8AC3E}">
+        <p14:creationId xmlns:p14="http://schemas.microsoft.com/office/powerpoint/2010/main" val="2874532621"/>
+      </p:ext>
+    </p:extLst>
+  </p:cSld>
+  <p:clrMapOvr>
+    <a:masterClrMapping/>
+  </p:clrMapOvr>
+</p:sld>
+</file>
+
+<file path=ppt/slides/slide51.xml><?xml version="1.0" encoding="utf-8"?>
 <p:sld xmlns:a="http://schemas.openxmlformats.org/drawingml/2006/main" xmlns:r="http://schemas.openxmlformats.org/officeDocument/2006/relationships" xmlns:p="http://schemas.openxmlformats.org/presentationml/2006/main">
   <p:cSld>
     <p:bg>
